--- a/plugins/gradient-cio/assets/examples/gradient-idd-manager-shortlist.pptx
+++ b/plugins/gradient-cio/assets/examples/gradient-idd-manager-shortlist.pptx
@@ -2934,7 +2934,7 @@
         </p:nvSpPr>
         <p:spPr>
           <a:xfrm>
-            <a:off x="685800" y="1828800"/>
+            <a:off x="685800" y="1664208"/>
             <a:ext cx="9966960" cy="274320"/>
           </a:xfrm>
           <a:prstGeom prst="rect">
@@ -2952,7 +2952,7 @@
               <a:spcAft>
                 <a:spcPts val="0"/>
               </a:spcAft>
-              <a:defRPr sz="900" b="1">
+              <a:defRPr sz="850" b="1">
                 <a:solidFill>
                   <a:srgbClr val="C6F432"/>
                 </a:solidFill>
@@ -2976,7 +2976,7 @@
         </p:nvSpPr>
         <p:spPr>
           <a:xfrm>
-            <a:off x="685800" y="2176272"/>
+            <a:off x="685800" y="2011680"/>
             <a:ext cx="9966960" cy="1234440"/>
           </a:xfrm>
           <a:prstGeom prst="rect">
@@ -2994,7 +2994,7 @@
               <a:spcAft>
                 <a:spcPts val="0"/>
               </a:spcAft>
-              <a:defRPr sz="3400" b="1">
+              <a:defRPr sz="3300" b="1">
                 <a:solidFill>
                   <a:srgbClr val="FFFFFF"/>
                 </a:solidFill>
@@ -3005,7 +3005,7 @@
               <a:rPr>
                 <a:latin typeface="Inter"/>
               </a:rPr>
-              <a:t>Northstar shortlist report (TEST)</a:t>
+              <a:t>Northstar Manager Shortlist</a:t>
             </a:r>
           </a:p>
         </p:txBody>
@@ -3018,8 +3018,8 @@
         </p:nvSpPr>
         <p:spPr>
           <a:xfrm>
-            <a:off x="685800" y="3456432"/>
-            <a:ext cx="9692640" cy="640080"/>
+            <a:off x="685800" y="3273552"/>
+            <a:ext cx="9692640" cy="594360"/>
           </a:xfrm>
           <a:prstGeom prst="rect">
             <a:avLst/>
@@ -3036,7 +3036,7 @@
               <a:spcAft>
                 <a:spcPts val="0"/>
               </a:spcAft>
-              <a:defRPr sz="1500" b="0">
+              <a:defRPr sz="1400" b="0">
                 <a:solidFill>
                   <a:srgbClr val="9AA5B1"/>
                 </a:solidFill>
@@ -3047,7 +3047,7 @@
               <a:rPr>
                 <a:latin typeface="Inter"/>
               </a:rPr>
-              <a:t>Governed return evidence</a:t>
+              <a:t>Candidate screening for Investment Committee review</a:t>
             </a:r>
           </a:p>
         </p:txBody>
@@ -3060,8 +3060,8 @@
         </p:nvSpPr>
         <p:spPr>
           <a:xfrm>
-            <a:off x="685800" y="4251960"/>
-            <a:ext cx="1005840" cy="54864"/>
+            <a:off x="685800" y="4005072"/>
+            <a:ext cx="822960" cy="45720"/>
           </a:xfrm>
           <a:prstGeom prst="rect">
             <a:avLst/>
@@ -3109,8 +3109,8 @@
         </p:nvSpPr>
         <p:spPr>
           <a:xfrm>
-            <a:off x="685800" y="4572000"/>
-            <a:ext cx="3063240" cy="182880"/>
+            <a:off x="685800" y="4315968"/>
+            <a:ext cx="4709160" cy="182880"/>
           </a:xfrm>
           <a:prstGeom prst="rect">
             <a:avLst/>
@@ -3138,7 +3138,7 @@
               <a:rPr>
                 <a:latin typeface="Inter"/>
               </a:rPr>
-              <a:t>MODE</a:t>
+              <a:t>REVIEW</a:t>
             </a:r>
           </a:p>
         </p:txBody>
@@ -3151,8 +3151,8 @@
         </p:nvSpPr>
         <p:spPr>
           <a:xfrm>
-            <a:off x="685800" y="4773168"/>
-            <a:ext cx="3063240" cy="320040"/>
+            <a:off x="685800" y="4507992"/>
+            <a:ext cx="4709160" cy="310896"/>
           </a:xfrm>
           <a:prstGeom prst="rect">
             <a:avLst/>
@@ -3180,7 +3180,7 @@
               <a:rPr>
                 <a:latin typeface="Inter"/>
               </a:rPr>
-              <a:t>Compare</a:t>
+              <a:t>Manager shortlist</a:t>
             </a:r>
           </a:p>
         </p:txBody>
@@ -3193,8 +3193,8 @@
         </p:nvSpPr>
         <p:spPr>
           <a:xfrm>
-            <a:off x="4160520" y="4572000"/>
-            <a:ext cx="3063240" cy="182880"/>
+            <a:off x="5852160" y="4315968"/>
+            <a:ext cx="4709160" cy="182880"/>
           </a:xfrm>
           <a:prstGeom prst="rect">
             <a:avLst/>
@@ -3222,7 +3222,7 @@
               <a:rPr>
                 <a:latin typeface="Inter"/>
               </a:rPr>
-              <a:t>SCOPE</a:t>
+              <a:t>EVIDENCE</a:t>
             </a:r>
           </a:p>
         </p:txBody>
@@ -3235,8 +3235,8 @@
         </p:nvSpPr>
         <p:spPr>
           <a:xfrm>
-            <a:off x="4160520" y="4773168"/>
-            <a:ext cx="3063240" cy="320040"/>
+            <a:off x="5852160" y="4507992"/>
+            <a:ext cx="4709160" cy="310896"/>
           </a:xfrm>
           <a:prstGeom prst="rect">
             <a:avLst/>
@@ -3264,21 +3264,189 @@
               <a:rPr>
                 <a:latin typeface="Inter"/>
               </a:rPr>
-              <a:t>Fictional TEST managers</a:t>
-            </a:r>
-          </a:p>
-        </p:txBody>
-      </p:sp>
-      <p:sp>
-        <p:nvSpPr>
-          <p:cNvPr id="13" name="Rectangle 12"/>
+              <a:t>Governed manager data</a:t>
+            </a:r>
+          </a:p>
+        </p:txBody>
+      </p:sp>
+      <p:sp>
+        <p:nvSpPr>
+          <p:cNvPr id="13" name="TextBox 12"/>
+          <p:cNvSpPr txBox="1"/>
+          <p:nvPr/>
+        </p:nvSpPr>
+        <p:spPr>
+          <a:xfrm>
+            <a:off x="685800" y="4937759"/>
+            <a:ext cx="4709160" cy="182880"/>
+          </a:xfrm>
+          <a:prstGeom prst="rect">
+            <a:avLst/>
+          </a:prstGeom>
+          <a:noFill/>
+        </p:spPr>
+        <p:txBody>
+          <a:bodyPr wrap="none" lIns="9144" rIns="9144" tIns="9144" bIns="9144" anchor="t">
+            <a:spAutoFit/>
+          </a:bodyPr>
+          <a:lstStyle/>
+          <a:p>
+            <a:pPr algn="l">
+              <a:spcAft>
+                <a:spcPts val="0"/>
+              </a:spcAft>
+              <a:defRPr sz="700" b="1">
+                <a:solidFill>
+                  <a:srgbClr val="8A94A1"/>
+                </a:solidFill>
+                <a:latin typeface="Inter"/>
+              </a:defRPr>
+            </a:pPr>
+            <a:r>
+              <a:rPr>
+                <a:latin typeface="Inter"/>
+              </a:rPr>
+              <a:t>AUDIENCE</a:t>
+            </a:r>
+          </a:p>
+        </p:txBody>
+      </p:sp>
+      <p:sp>
+        <p:nvSpPr>
+          <p:cNvPr id="14" name="TextBox 13"/>
+          <p:cNvSpPr txBox="1"/>
+          <p:nvPr/>
+        </p:nvSpPr>
+        <p:spPr>
+          <a:xfrm>
+            <a:off x="685800" y="5129783"/>
+            <a:ext cx="4709160" cy="310896"/>
+          </a:xfrm>
+          <a:prstGeom prst="rect">
+            <a:avLst/>
+          </a:prstGeom>
+          <a:noFill/>
+        </p:spPr>
+        <p:txBody>
+          <a:bodyPr wrap="none" lIns="9144" rIns="9144" tIns="9144" bIns="9144" anchor="t">
+            <a:spAutoFit/>
+          </a:bodyPr>
+          <a:lstStyle/>
+          <a:p>
+            <a:pPr algn="l">
+              <a:spcAft>
+                <a:spcPts val="0"/>
+              </a:spcAft>
+              <a:defRPr sz="1000" b="1">
+                <a:solidFill>
+                  <a:srgbClr val="FFFFFF"/>
+                </a:solidFill>
+                <a:latin typeface="Inter"/>
+              </a:defRPr>
+            </a:pPr>
+            <a:r>
+              <a:rPr>
+                <a:latin typeface="Inter"/>
+              </a:rPr>
+              <a:t>Investment Committee</a:t>
+            </a:r>
+          </a:p>
+        </p:txBody>
+      </p:sp>
+      <p:sp>
+        <p:nvSpPr>
+          <p:cNvPr id="15" name="TextBox 14"/>
+          <p:cNvSpPr txBox="1"/>
+          <p:nvPr/>
+        </p:nvSpPr>
+        <p:spPr>
+          <a:xfrm>
+            <a:off x="5852160" y="4937759"/>
+            <a:ext cx="4709160" cy="182880"/>
+          </a:xfrm>
+          <a:prstGeom prst="rect">
+            <a:avLst/>
+          </a:prstGeom>
+          <a:noFill/>
+        </p:spPr>
+        <p:txBody>
+          <a:bodyPr wrap="none" lIns="9144" rIns="9144" tIns="9144" bIns="9144" anchor="t">
+            <a:spAutoFit/>
+          </a:bodyPr>
+          <a:lstStyle/>
+          <a:p>
+            <a:pPr algn="l">
+              <a:spcAft>
+                <a:spcPts val="0"/>
+              </a:spcAft>
+              <a:defRPr sz="700" b="1">
+                <a:solidFill>
+                  <a:srgbClr val="8A94A1"/>
+                </a:solidFill>
+                <a:latin typeface="Inter"/>
+              </a:defRPr>
+            </a:pPr>
+            <a:r>
+              <a:rPr>
+                <a:latin typeface="Inter"/>
+              </a:rPr>
+              <a:t>DATA AS OF</a:t>
+            </a:r>
+          </a:p>
+        </p:txBody>
+      </p:sp>
+      <p:sp>
+        <p:nvSpPr>
+          <p:cNvPr id="16" name="TextBox 15"/>
+          <p:cNvSpPr txBox="1"/>
+          <p:nvPr/>
+        </p:nvSpPr>
+        <p:spPr>
+          <a:xfrm>
+            <a:off x="5852160" y="5129783"/>
+            <a:ext cx="4709160" cy="310896"/>
+          </a:xfrm>
+          <a:prstGeom prst="rect">
+            <a:avLst/>
+          </a:prstGeom>
+          <a:noFill/>
+        </p:spPr>
+        <p:txBody>
+          <a:bodyPr wrap="none" lIns="9144" rIns="9144" tIns="9144" bIns="9144" anchor="t">
+            <a:spAutoFit/>
+          </a:bodyPr>
+          <a:lstStyle/>
+          <a:p>
+            <a:pPr algn="l">
+              <a:spcAft>
+                <a:spcPts val="0"/>
+              </a:spcAft>
+              <a:defRPr sz="1000" b="1">
+                <a:solidFill>
+                  <a:srgbClr val="FFFFFF"/>
+                </a:solidFill>
+                <a:latin typeface="Inter"/>
+              </a:defRPr>
+            </a:pPr>
+            <a:r>
+              <a:rPr>
+                <a:latin typeface="Inter"/>
+              </a:rPr>
+              <a:t>2026-10-01</a:t>
+            </a:r>
+          </a:p>
+        </p:txBody>
+      </p:sp>
+      <p:sp>
+        <p:nvSpPr>
+          <p:cNvPr id="17" name="Rectangle 16"/>
           <p:cNvSpPr/>
           <p:nvPr/>
         </p:nvSpPr>
         <p:spPr>
           <a:xfrm>
-            <a:off x="685800" y="5833872"/>
-            <a:ext cx="3063240" cy="384048"/>
+            <a:off x="685800" y="5687568"/>
+            <a:ext cx="3337560" cy="530352"/>
           </a:xfrm>
           <a:prstGeom prst="rect">
             <a:avLst/>
@@ -3320,14 +3488,140 @@
       </p:sp>
       <p:sp>
         <p:nvSpPr>
-          <p:cNvPr id="14" name="TextBox 13"/>
+          <p:cNvPr id="18" name="TextBox 17"/>
           <p:cNvSpPr txBox="1"/>
           <p:nvPr/>
         </p:nvSpPr>
         <p:spPr>
           <a:xfrm>
-            <a:off x="822960" y="5934456"/>
-            <a:ext cx="2788920" cy="164592"/>
+            <a:off x="822960" y="5760720"/>
+            <a:ext cx="3063240" cy="128016"/>
+          </a:xfrm>
+          <a:prstGeom prst="rect">
+            <a:avLst/>
+          </a:prstGeom>
+          <a:noFill/>
+        </p:spPr>
+        <p:txBody>
+          <a:bodyPr wrap="none" lIns="9144" rIns="9144" tIns="9144" bIns="9144" anchor="t">
+            <a:spAutoFit/>
+          </a:bodyPr>
+          <a:lstStyle/>
+          <a:p>
+            <a:pPr algn="l">
+              <a:spcAft>
+                <a:spcPts val="0"/>
+              </a:spcAft>
+              <a:defRPr sz="620" b="1">
+                <a:solidFill>
+                  <a:srgbClr val="0D1117"/>
+                </a:solidFill>
+                <a:latin typeface="Inter"/>
+              </a:defRPr>
+            </a:pPr>
+            <a:r>
+              <a:rPr>
+                <a:latin typeface="Inter"/>
+              </a:rPr>
+              <a:t>OVERALL VIEW</a:t>
+            </a:r>
+          </a:p>
+        </p:txBody>
+      </p:sp>
+      <p:sp>
+        <p:nvSpPr>
+          <p:cNvPr id="19" name="TextBox 18"/>
+          <p:cNvSpPr txBox="1"/>
+          <p:nvPr/>
+        </p:nvSpPr>
+        <p:spPr>
+          <a:xfrm>
+            <a:off x="822960" y="5916168"/>
+            <a:ext cx="3063240" cy="182880"/>
+          </a:xfrm>
+          <a:prstGeom prst="rect">
+            <a:avLst/>
+          </a:prstGeom>
+          <a:noFill/>
+        </p:spPr>
+        <p:txBody>
+          <a:bodyPr wrap="none" lIns="9144" rIns="9144" tIns="9144" bIns="9144" anchor="t">
+            <a:spAutoFit/>
+          </a:bodyPr>
+          <a:lstStyle/>
+          <a:p>
+            <a:pPr algn="l">
+              <a:spcAft>
+                <a:spcPts val="0"/>
+              </a:spcAft>
+              <a:defRPr sz="900" b="1">
+                <a:solidFill>
+                  <a:srgbClr val="0D1117"/>
+                </a:solidFill>
+                <a:latin typeface="Inter"/>
+              </a:defRPr>
+            </a:pPr>
+            <a:r>
+              <a:rPr>
+                <a:latin typeface="Inter"/>
+              </a:rPr>
+              <a:t>Insufficient governed evidence</a:t>
+            </a:r>
+          </a:p>
+        </p:txBody>
+      </p:sp>
+      <p:sp>
+        <p:nvSpPr>
+          <p:cNvPr id="20" name="TextBox 19"/>
+          <p:cNvSpPr txBox="1"/>
+          <p:nvPr/>
+        </p:nvSpPr>
+        <p:spPr>
+          <a:xfrm>
+            <a:off x="4297680" y="5733288"/>
+            <a:ext cx="3108960" cy="164592"/>
+          </a:xfrm>
+          <a:prstGeom prst="rect">
+            <a:avLst/>
+          </a:prstGeom>
+          <a:noFill/>
+        </p:spPr>
+        <p:txBody>
+          <a:bodyPr wrap="none" lIns="9144" rIns="9144" tIns="9144" bIns="9144" anchor="t">
+            <a:spAutoFit/>
+          </a:bodyPr>
+          <a:lstStyle/>
+          <a:p>
+            <a:pPr algn="l">
+              <a:spcAft>
+                <a:spcPts val="0"/>
+              </a:spcAft>
+              <a:defRPr sz="650" b="1">
+                <a:solidFill>
+                  <a:srgbClr val="8A94A1"/>
+                </a:solidFill>
+                <a:latin typeface="Inter"/>
+              </a:defRPr>
+            </a:pPr>
+            <a:r>
+              <a:rPr>
+                <a:latin typeface="Inter"/>
+              </a:rPr>
+              <a:t>SCOPE REVIEWED</a:t>
+            </a:r>
+          </a:p>
+        </p:txBody>
+      </p:sp>
+      <p:sp>
+        <p:nvSpPr>
+          <p:cNvPr id="21" name="TextBox 20"/>
+          <p:cNvSpPr txBox="1"/>
+          <p:nvPr/>
+        </p:nvSpPr>
+        <p:spPr>
+          <a:xfrm>
+            <a:off x="4297680" y="5934456"/>
+            <a:ext cx="3108960" cy="201168"/>
           </a:xfrm>
           <a:prstGeom prst="rect">
             <a:avLst/>
@@ -3346,90 +3640,6 @@
               </a:spcAft>
               <a:defRPr sz="800" b="1">
                 <a:solidFill>
-                  <a:srgbClr val="0D1117"/>
-                </a:solidFill>
-                <a:latin typeface="Inter"/>
-              </a:defRPr>
-            </a:pPr>
-            <a:r>
-              <a:rPr>
-                <a:latin typeface="Inter"/>
-              </a:rPr>
-              <a:t>Insufficient governed evidence</a:t>
-            </a:r>
-          </a:p>
-        </p:txBody>
-      </p:sp>
-      <p:sp>
-        <p:nvSpPr>
-          <p:cNvPr id="15" name="TextBox 14"/>
-          <p:cNvSpPr txBox="1"/>
-          <p:nvPr/>
-        </p:nvSpPr>
-        <p:spPr>
-          <a:xfrm>
-            <a:off x="3977639" y="5824728"/>
-            <a:ext cx="3108960" cy="164592"/>
-          </a:xfrm>
-          <a:prstGeom prst="rect">
-            <a:avLst/>
-          </a:prstGeom>
-          <a:noFill/>
-        </p:spPr>
-        <p:txBody>
-          <a:bodyPr wrap="none" lIns="9144" rIns="9144" tIns="9144" bIns="9144" anchor="t">
-            <a:spAutoFit/>
-          </a:bodyPr>
-          <a:lstStyle/>
-          <a:p>
-            <a:pPr algn="l">
-              <a:spcAft>
-                <a:spcPts val="0"/>
-              </a:spcAft>
-              <a:defRPr sz="650" b="1">
-                <a:solidFill>
-                  <a:srgbClr val="8A94A1"/>
-                </a:solidFill>
-                <a:latin typeface="Inter"/>
-              </a:defRPr>
-            </a:pPr>
-            <a:r>
-              <a:rPr>
-                <a:latin typeface="Inter"/>
-              </a:rPr>
-              <a:t>EVIDENCE COMPLETENESS</a:t>
-            </a:r>
-          </a:p>
-        </p:txBody>
-      </p:sp>
-      <p:sp>
-        <p:nvSpPr>
-          <p:cNvPr id="16" name="TextBox 15"/>
-          <p:cNvSpPr txBox="1"/>
-          <p:nvPr/>
-        </p:nvSpPr>
-        <p:spPr>
-          <a:xfrm>
-            <a:off x="3977639" y="5998464"/>
-            <a:ext cx="3108960" cy="201168"/>
-          </a:xfrm>
-          <a:prstGeom prst="rect">
-            <a:avLst/>
-          </a:prstGeom>
-          <a:noFill/>
-        </p:spPr>
-        <p:txBody>
-          <a:bodyPr wrap="none" lIns="9144" rIns="9144" tIns="9144" bIns="9144" anchor="t">
-            <a:spAutoFit/>
-          </a:bodyPr>
-          <a:lstStyle/>
-          <a:p>
-            <a:pPr algn="l">
-              <a:spcAft>
-                <a:spcPts val="0"/>
-              </a:spcAft>
-              <a:defRPr sz="800" b="1">
-                <a:solidFill>
                   <a:srgbClr val="FFFFFF"/>
                 </a:solidFill>
                 <a:latin typeface="Inter"/>
@@ -3446,14 +3656,14 @@
       </p:sp>
       <p:sp>
         <p:nvSpPr>
-          <p:cNvPr id="17" name="TextBox 16"/>
+          <p:cNvPr id="22" name="TextBox 21"/>
           <p:cNvSpPr txBox="1"/>
           <p:nvPr/>
         </p:nvSpPr>
         <p:spPr>
           <a:xfrm>
-            <a:off x="685800" y="6473952"/>
-            <a:ext cx="8046720" cy="182880"/>
+            <a:off x="685800" y="6400800"/>
+            <a:ext cx="8046720" cy="146304"/>
           </a:xfrm>
           <a:prstGeom prst="rect">
             <a:avLst/>
@@ -3481,14 +3691,56 @@
               <a:rPr>
                 <a:latin typeface="Inter"/>
               </a:rPr>
-              <a:t>Confidential — prepared for internal investment use</a:t>
-            </a:r>
-          </a:p>
-        </p:txBody>
-      </p:sp>
-      <p:sp>
-        <p:nvSpPr>
-          <p:cNvPr id="18" name="TextBox 17"/>
+              <a:t>Confidential — manager selection review</a:t>
+            </a:r>
+          </a:p>
+        </p:txBody>
+      </p:sp>
+      <p:sp>
+        <p:nvSpPr>
+          <p:cNvPr id="23" name="TextBox 22"/>
+          <p:cNvSpPr txBox="1"/>
+          <p:nvPr/>
+        </p:nvSpPr>
+        <p:spPr>
+          <a:xfrm>
+            <a:off x="685800" y="6556248"/>
+            <a:ext cx="8046720" cy="128016"/>
+          </a:xfrm>
+          <a:prstGeom prst="rect">
+            <a:avLst/>
+          </a:prstGeom>
+          <a:noFill/>
+        </p:spPr>
+        <p:txBody>
+          <a:bodyPr wrap="none" lIns="9144" rIns="9144" tIns="9144" bIns="9144" anchor="t">
+            <a:spAutoFit/>
+          </a:bodyPr>
+          <a:lstStyle/>
+          <a:p>
+            <a:pPr algn="l">
+              <a:spcAft>
+                <a:spcPts val="0"/>
+              </a:spcAft>
+              <a:defRPr sz="650" b="0">
+                <a:solidFill>
+                  <a:srgbClr val="8A94A1"/>
+                </a:solidFill>
+                <a:latin typeface="Inter"/>
+              </a:defRPr>
+            </a:pPr>
+            <a:r>
+              <a:rPr>
+                <a:latin typeface="Inter"/>
+              </a:rPr>
+              <a:t>Illustrative sample · not client data</a:t>
+            </a:r>
+          </a:p>
+        </p:txBody>
+      </p:sp>
+      <p:sp>
+        <p:nvSpPr>
+          <p:cNvPr id="24" name="TextBox 23"/>
           <p:cNvSpPr txBox="1"/>
           <p:nvPr/>
         </p:nvSpPr>
@@ -3604,7 +3856,7 @@
         <p:spPr>
           <a:xfrm>
             <a:off x="640080" y="329184"/>
-            <a:ext cx="9875520" cy="182880"/>
+            <a:ext cx="5303520" cy="182880"/>
           </a:xfrm>
           <a:prstGeom prst="rect">
             <a:avLst/>
@@ -3645,6 +3897,48 @@
         </p:nvSpPr>
         <p:spPr>
           <a:xfrm>
+            <a:off x="5897880" y="310896"/>
+            <a:ext cx="4800600" cy="256032"/>
+          </a:xfrm>
+          <a:prstGeom prst="rect">
+            <a:avLst/>
+          </a:prstGeom>
+          <a:noFill/>
+        </p:spPr>
+        <p:txBody>
+          <a:bodyPr wrap="none" lIns="9144" rIns="9144" tIns="9144" bIns="9144" anchor="t">
+            <a:spAutoFit/>
+          </a:bodyPr>
+          <a:lstStyle/>
+          <a:p>
+            <a:pPr algn="r">
+              <a:spcAft>
+                <a:spcPts val="0"/>
+              </a:spcAft>
+              <a:defRPr sz="680" b="1">
+                <a:solidFill>
+                  <a:srgbClr val="4F6B00"/>
+                </a:solidFill>
+                <a:latin typeface="Inter"/>
+              </a:defRPr>
+            </a:pPr>
+            <a:r>
+              <a:rPr>
+                <a:latin typeface="Inter"/>
+              </a:rPr>
+              <a:t>Illustrative, Gradient Maintained — demo data, not the client's holdings or managers</a:t>
+            </a:r>
+          </a:p>
+        </p:txBody>
+      </p:sp>
+      <p:sp>
+        <p:nvSpPr>
+          <p:cNvPr id="5" name="TextBox 4"/>
+          <p:cNvSpPr txBox="1"/>
+          <p:nvPr/>
+        </p:nvSpPr>
+        <p:spPr>
+          <a:xfrm>
             <a:off x="640080" y="566928"/>
             <a:ext cx="10058400" cy="530352"/>
           </a:xfrm>
@@ -3681,7 +3975,7 @@
       </p:sp>
       <p:sp>
         <p:nvSpPr>
-          <p:cNvPr id="5" name="Rectangle 4"/>
+          <p:cNvPr id="6" name="Rectangle 5"/>
           <p:cNvSpPr/>
           <p:nvPr/>
         </p:nvSpPr>
@@ -3730,7 +4024,7 @@
       </p:sp>
       <p:sp>
         <p:nvSpPr>
-          <p:cNvPr id="6" name="Rectangle 5"/>
+          <p:cNvPr id="7" name="Rectangle 6"/>
           <p:cNvSpPr/>
           <p:nvPr/>
         </p:nvSpPr>
@@ -3779,7 +4073,7 @@
       </p:sp>
       <p:sp>
         <p:nvSpPr>
-          <p:cNvPr id="7" name="TextBox 6"/>
+          <p:cNvPr id="8" name="TextBox 7"/>
           <p:cNvSpPr txBox="1"/>
           <p:nvPr/>
         </p:nvSpPr>
@@ -3821,7 +4115,7 @@
       </p:sp>
       <p:sp>
         <p:nvSpPr>
-          <p:cNvPr id="8" name="Rectangle 7"/>
+          <p:cNvPr id="9" name="Rectangle 8"/>
           <p:cNvSpPr/>
           <p:nvPr/>
         </p:nvSpPr>
@@ -3870,7 +4164,7 @@
       </p:sp>
       <p:sp>
         <p:nvSpPr>
-          <p:cNvPr id="9" name="Rectangle 8"/>
+          <p:cNvPr id="10" name="Rectangle 9"/>
           <p:cNvSpPr/>
           <p:nvPr/>
         </p:nvSpPr>
@@ -3919,7 +4213,7 @@
       </p:sp>
       <p:sp>
         <p:nvSpPr>
-          <p:cNvPr id="10" name="TextBox 9"/>
+          <p:cNvPr id="11" name="TextBox 10"/>
           <p:cNvSpPr txBox="1"/>
           <p:nvPr/>
         </p:nvSpPr>
@@ -3961,7 +4255,7 @@
       </p:sp>
       <p:sp>
         <p:nvSpPr>
-          <p:cNvPr id="11" name="TextBox 10"/>
+          <p:cNvPr id="12" name="TextBox 11"/>
           <p:cNvSpPr txBox="1"/>
           <p:nvPr/>
         </p:nvSpPr>
@@ -4003,7 +4297,7 @@
       </p:sp>
       <p:sp>
         <p:nvSpPr>
-          <p:cNvPr id="12" name="Rectangle 11"/>
+          <p:cNvPr id="13" name="Rectangle 12"/>
           <p:cNvSpPr/>
           <p:nvPr/>
         </p:nvSpPr>
@@ -4052,7 +4346,7 @@
       </p:sp>
       <p:sp>
         <p:nvSpPr>
-          <p:cNvPr id="13" name="Rectangle 12"/>
+          <p:cNvPr id="14" name="Rectangle 13"/>
           <p:cNvSpPr/>
           <p:nvPr/>
         </p:nvSpPr>
@@ -4101,7 +4395,7 @@
       </p:sp>
       <p:sp>
         <p:nvSpPr>
-          <p:cNvPr id="14" name="TextBox 13"/>
+          <p:cNvPr id="15" name="TextBox 14"/>
           <p:cNvSpPr txBox="1"/>
           <p:nvPr/>
         </p:nvSpPr>
@@ -4143,7 +4437,7 @@
       </p:sp>
       <p:sp>
         <p:nvSpPr>
-          <p:cNvPr id="15" name="TextBox 14"/>
+          <p:cNvPr id="16" name="TextBox 15"/>
           <p:cNvSpPr txBox="1"/>
           <p:nvPr/>
         </p:nvSpPr>
@@ -4185,7 +4479,7 @@
       </p:sp>
       <p:sp>
         <p:nvSpPr>
-          <p:cNvPr id="16" name="Rectangle 15"/>
+          <p:cNvPr id="17" name="Rectangle 16"/>
           <p:cNvSpPr/>
           <p:nvPr/>
         </p:nvSpPr>
@@ -4234,7 +4528,7 @@
       </p:sp>
       <p:sp>
         <p:nvSpPr>
-          <p:cNvPr id="17" name="Rectangle 16"/>
+          <p:cNvPr id="18" name="Rectangle 17"/>
           <p:cNvSpPr/>
           <p:nvPr/>
         </p:nvSpPr>
@@ -4283,7 +4577,7 @@
       </p:sp>
       <p:sp>
         <p:nvSpPr>
-          <p:cNvPr id="18" name="TextBox 17"/>
+          <p:cNvPr id="19" name="TextBox 18"/>
           <p:cNvSpPr txBox="1"/>
           <p:nvPr/>
         </p:nvSpPr>
@@ -4325,7 +4619,7 @@
       </p:sp>
       <p:sp>
         <p:nvSpPr>
-          <p:cNvPr id="19" name="TextBox 18"/>
+          <p:cNvPr id="20" name="TextBox 19"/>
           <p:cNvSpPr txBox="1"/>
           <p:nvPr/>
         </p:nvSpPr>
@@ -4367,7 +4661,7 @@
       </p:sp>
       <p:sp>
         <p:nvSpPr>
-          <p:cNvPr id="20" name="Rectangle 19"/>
+          <p:cNvPr id="21" name="Rectangle 20"/>
           <p:cNvSpPr/>
           <p:nvPr/>
         </p:nvSpPr>
@@ -4416,7 +4710,7 @@
       </p:sp>
       <p:sp>
         <p:nvSpPr>
-          <p:cNvPr id="21" name="TextBox 20"/>
+          <p:cNvPr id="22" name="TextBox 21"/>
           <p:cNvSpPr txBox="1"/>
           <p:nvPr/>
         </p:nvSpPr>
@@ -4458,7 +4752,7 @@
       </p:sp>
       <p:sp>
         <p:nvSpPr>
-          <p:cNvPr id="22" name="TextBox 21"/>
+          <p:cNvPr id="23" name="TextBox 22"/>
           <p:cNvSpPr txBox="1"/>
           <p:nvPr/>
         </p:nvSpPr>
@@ -4493,14 +4787,14 @@
               <a:rPr>
                 <a:latin typeface="Inter"/>
               </a:rPr>
-              <a:t>Confidential — prepared for internal investment use · Data as of 2025-12-31</a:t>
-            </a:r>
-          </a:p>
-        </p:txBody>
-      </p:sp>
-      <p:sp>
-        <p:nvSpPr>
-          <p:cNvPr id="23" name="TextBox 22"/>
+              <a:t>Confidential — manager selection review · Data as of 2025-12-31</a:t>
+            </a:r>
+          </a:p>
+        </p:txBody>
+      </p:sp>
+      <p:sp>
+        <p:nvSpPr>
+          <p:cNvPr id="24" name="TextBox 23"/>
           <p:cNvSpPr txBox="1"/>
           <p:nvPr/>
         </p:nvSpPr>
@@ -4616,7 +4910,7 @@
         <p:spPr>
           <a:xfrm>
             <a:off x="640080" y="329184"/>
-            <a:ext cx="9875520" cy="182880"/>
+            <a:ext cx="5303520" cy="182880"/>
           </a:xfrm>
           <a:prstGeom prst="rect">
             <a:avLst/>
@@ -4644,7 +4938,7 @@
               <a:rPr>
                 <a:latin typeface="Inter"/>
               </a:rPr>
-              <a:t>BENCHMARK IDENTITY REMAINS ADVISORY FOR THE TEST CANDIDATES</a:t>
+              <a:t>BENCHMARK IDENTITY REMAINS ADVISORY FOR THE REVIEWED CANDIDATES</a:t>
             </a:r>
           </a:p>
         </p:txBody>
@@ -4652,6 +4946,48 @@
       <p:sp>
         <p:nvSpPr>
           <p:cNvPr id="4" name="TextBox 3"/>
+          <p:cNvSpPr txBox="1"/>
+          <p:nvPr/>
+        </p:nvSpPr>
+        <p:spPr>
+          <a:xfrm>
+            <a:off x="5897880" y="310896"/>
+            <a:ext cx="4800600" cy="256032"/>
+          </a:xfrm>
+          <a:prstGeom prst="rect">
+            <a:avLst/>
+          </a:prstGeom>
+          <a:noFill/>
+        </p:spPr>
+        <p:txBody>
+          <a:bodyPr wrap="none" lIns="9144" rIns="9144" tIns="9144" bIns="9144" anchor="t">
+            <a:spAutoFit/>
+          </a:bodyPr>
+          <a:lstStyle/>
+          <a:p>
+            <a:pPr algn="r">
+              <a:spcAft>
+                <a:spcPts val="0"/>
+              </a:spcAft>
+              <a:defRPr sz="680" b="1">
+                <a:solidFill>
+                  <a:srgbClr val="4F6B00"/>
+                </a:solidFill>
+                <a:latin typeface="Inter"/>
+              </a:defRPr>
+            </a:pPr>
+            <a:r>
+              <a:rPr>
+                <a:latin typeface="Inter"/>
+              </a:rPr>
+              <a:t>Illustrative, Gradient Maintained — demo data, not the client's holdings or managers</a:t>
+            </a:r>
+          </a:p>
+        </p:txBody>
+      </p:sp>
+      <p:sp>
+        <p:nvSpPr>
+          <p:cNvPr id="5" name="TextBox 4"/>
           <p:cNvSpPr txBox="1"/>
           <p:nvPr/>
         </p:nvSpPr>
@@ -4693,7 +5029,7 @@
       </p:sp>
       <p:sp>
         <p:nvSpPr>
-          <p:cNvPr id="5" name="Rectangle 4"/>
+          <p:cNvPr id="6" name="Rectangle 5"/>
           <p:cNvSpPr/>
           <p:nvPr/>
         </p:nvSpPr>
@@ -4742,7 +5078,7 @@
       </p:sp>
       <p:sp>
         <p:nvSpPr>
-          <p:cNvPr id="6" name="Rectangle 5"/>
+          <p:cNvPr id="7" name="Rectangle 6"/>
           <p:cNvSpPr/>
           <p:nvPr/>
         </p:nvSpPr>
@@ -4791,7 +5127,7 @@
       </p:sp>
       <p:sp>
         <p:nvSpPr>
-          <p:cNvPr id="7" name="TextBox 6"/>
+          <p:cNvPr id="8" name="TextBox 7"/>
           <p:cNvSpPr txBox="1"/>
           <p:nvPr/>
         </p:nvSpPr>
@@ -4833,7 +5169,7 @@
       </p:sp>
       <p:graphicFrame>
         <p:nvGraphicFramePr>
-          <p:cNvPr id="8" name="Table 7"/>
+          <p:cNvPr id="9" name="Table 8"/>
           <p:cNvGraphicFramePr>
             <a:graphicFrameLocks noGrp="1"/>
           </p:cNvGraphicFramePr>
@@ -5026,7 +5362,7 @@
       </p:graphicFrame>
       <p:sp>
         <p:nvSpPr>
-          <p:cNvPr id="9" name="Rectangle 8"/>
+          <p:cNvPr id="10" name="Rectangle 9"/>
           <p:cNvSpPr/>
           <p:nvPr/>
         </p:nvSpPr>
@@ -5075,7 +5411,7 @@
       </p:sp>
       <p:sp>
         <p:nvSpPr>
-          <p:cNvPr id="10" name="TextBox 9"/>
+          <p:cNvPr id="11" name="TextBox 10"/>
           <p:cNvSpPr txBox="1"/>
           <p:nvPr/>
         </p:nvSpPr>
@@ -5117,7 +5453,7 @@
       </p:sp>
       <p:sp>
         <p:nvSpPr>
-          <p:cNvPr id="11" name="TextBox 10"/>
+          <p:cNvPr id="12" name="TextBox 11"/>
           <p:cNvSpPr txBox="1"/>
           <p:nvPr/>
         </p:nvSpPr>
@@ -5152,14 +5488,14 @@
               <a:rPr>
                 <a:latin typeface="Inter"/>
               </a:rPr>
-              <a:t>Confidential — prepared for internal investment use · Data as of 2025-12-31</a:t>
-            </a:r>
-          </a:p>
-        </p:txBody>
-      </p:sp>
-      <p:sp>
-        <p:nvSpPr>
-          <p:cNvPr id="12" name="TextBox 11"/>
+              <a:t>Confidential — manager selection review · Data as of 2025-12-31</a:t>
+            </a:r>
+          </a:p>
+        </p:txBody>
+      </p:sp>
+      <p:sp>
+        <p:nvSpPr>
+          <p:cNvPr id="13" name="TextBox 12"/>
           <p:cNvSpPr txBox="1"/>
           <p:nvPr/>
         </p:nvSpPr>
@@ -5275,7 +5611,7 @@
         <p:spPr>
           <a:xfrm>
             <a:off x="640080" y="329184"/>
-            <a:ext cx="9875520" cy="182880"/>
+            <a:ext cx="5303520" cy="182880"/>
           </a:xfrm>
           <a:prstGeom prst="rect">
             <a:avLst/>
@@ -5316,6 +5652,48 @@
         </p:nvSpPr>
         <p:spPr>
           <a:xfrm>
+            <a:off x="5897880" y="310896"/>
+            <a:ext cx="4800600" cy="256032"/>
+          </a:xfrm>
+          <a:prstGeom prst="rect">
+            <a:avLst/>
+          </a:prstGeom>
+          <a:noFill/>
+        </p:spPr>
+        <p:txBody>
+          <a:bodyPr wrap="none" lIns="9144" rIns="9144" tIns="9144" bIns="9144" anchor="t">
+            <a:spAutoFit/>
+          </a:bodyPr>
+          <a:lstStyle/>
+          <a:p>
+            <a:pPr algn="r">
+              <a:spcAft>
+                <a:spcPts val="0"/>
+              </a:spcAft>
+              <a:defRPr sz="680" b="1">
+                <a:solidFill>
+                  <a:srgbClr val="4F6B00"/>
+                </a:solidFill>
+                <a:latin typeface="Inter"/>
+              </a:defRPr>
+            </a:pPr>
+            <a:r>
+              <a:rPr>
+                <a:latin typeface="Inter"/>
+              </a:rPr>
+              <a:t>Illustrative, Gradient Maintained — demo data, not the client's holdings or managers</a:t>
+            </a:r>
+          </a:p>
+        </p:txBody>
+      </p:sp>
+      <p:sp>
+        <p:nvSpPr>
+          <p:cNvPr id="5" name="TextBox 4"/>
+          <p:cNvSpPr txBox="1"/>
+          <p:nvPr/>
+        </p:nvSpPr>
+        <p:spPr>
+          <a:xfrm>
             <a:off x="640080" y="566928"/>
             <a:ext cx="10058400" cy="530352"/>
           </a:xfrm>
@@ -5352,7 +5730,7 @@
       </p:sp>
       <p:sp>
         <p:nvSpPr>
-          <p:cNvPr id="5" name="Rectangle 4"/>
+          <p:cNvPr id="6" name="Rectangle 5"/>
           <p:cNvSpPr/>
           <p:nvPr/>
         </p:nvSpPr>
@@ -5401,7 +5779,7 @@
       </p:sp>
       <p:sp>
         <p:nvSpPr>
-          <p:cNvPr id="6" name="Rectangle 5"/>
+          <p:cNvPr id="7" name="Rectangle 6"/>
           <p:cNvSpPr/>
           <p:nvPr/>
         </p:nvSpPr>
@@ -5450,7 +5828,7 @@
       </p:sp>
       <p:sp>
         <p:nvSpPr>
-          <p:cNvPr id="7" name="TextBox 6"/>
+          <p:cNvPr id="8" name="TextBox 7"/>
           <p:cNvSpPr txBox="1"/>
           <p:nvPr/>
         </p:nvSpPr>
@@ -5492,7 +5870,7 @@
       </p:sp>
       <p:sp>
         <p:nvSpPr>
-          <p:cNvPr id="8" name="Rectangle 7"/>
+          <p:cNvPr id="9" name="Rectangle 8"/>
           <p:cNvSpPr/>
           <p:nvPr/>
         </p:nvSpPr>
@@ -5541,7 +5919,7 @@
       </p:sp>
       <p:sp>
         <p:nvSpPr>
-          <p:cNvPr id="9" name="Rectangle 8"/>
+          <p:cNvPr id="10" name="Rectangle 9"/>
           <p:cNvSpPr/>
           <p:nvPr/>
         </p:nvSpPr>
@@ -5590,7 +5968,7 @@
       </p:sp>
       <p:sp>
         <p:nvSpPr>
-          <p:cNvPr id="10" name="TextBox 9"/>
+          <p:cNvPr id="11" name="TextBox 10"/>
           <p:cNvSpPr txBox="1"/>
           <p:nvPr/>
         </p:nvSpPr>
@@ -5632,7 +6010,7 @@
       </p:sp>
       <p:sp>
         <p:nvSpPr>
-          <p:cNvPr id="11" name="TextBox 10"/>
+          <p:cNvPr id="12" name="TextBox 11"/>
           <p:cNvSpPr txBox="1"/>
           <p:nvPr/>
         </p:nvSpPr>
@@ -5674,7 +6052,7 @@
       </p:sp>
       <p:sp>
         <p:nvSpPr>
-          <p:cNvPr id="12" name="Rectangle 11"/>
+          <p:cNvPr id="13" name="Rectangle 12"/>
           <p:cNvSpPr/>
           <p:nvPr/>
         </p:nvSpPr>
@@ -5723,7 +6101,7 @@
       </p:sp>
       <p:sp>
         <p:nvSpPr>
-          <p:cNvPr id="13" name="Rectangle 12"/>
+          <p:cNvPr id="14" name="Rectangle 13"/>
           <p:cNvSpPr/>
           <p:nvPr/>
         </p:nvSpPr>
@@ -5772,7 +6150,7 @@
       </p:sp>
       <p:sp>
         <p:nvSpPr>
-          <p:cNvPr id="14" name="TextBox 13"/>
+          <p:cNvPr id="15" name="TextBox 14"/>
           <p:cNvSpPr txBox="1"/>
           <p:nvPr/>
         </p:nvSpPr>
@@ -5814,7 +6192,7 @@
       </p:sp>
       <p:sp>
         <p:nvSpPr>
-          <p:cNvPr id="15" name="TextBox 14"/>
+          <p:cNvPr id="16" name="TextBox 15"/>
           <p:cNvSpPr txBox="1"/>
           <p:nvPr/>
         </p:nvSpPr>
@@ -5856,7 +6234,7 @@
       </p:sp>
       <p:sp>
         <p:nvSpPr>
-          <p:cNvPr id="16" name="Rectangle 15"/>
+          <p:cNvPr id="17" name="Rectangle 16"/>
           <p:cNvSpPr/>
           <p:nvPr/>
         </p:nvSpPr>
@@ -5905,7 +6283,7 @@
       </p:sp>
       <p:sp>
         <p:nvSpPr>
-          <p:cNvPr id="17" name="TextBox 16"/>
+          <p:cNvPr id="18" name="TextBox 17"/>
           <p:cNvSpPr txBox="1"/>
           <p:nvPr/>
         </p:nvSpPr>
@@ -5947,7 +6325,7 @@
       </p:sp>
       <p:sp>
         <p:nvSpPr>
-          <p:cNvPr id="18" name="TextBox 17"/>
+          <p:cNvPr id="19" name="TextBox 18"/>
           <p:cNvSpPr txBox="1"/>
           <p:nvPr/>
         </p:nvSpPr>
@@ -5982,14 +6360,14 @@
               <a:rPr>
                 <a:latin typeface="Inter"/>
               </a:rPr>
-              <a:t>Confidential — prepared for internal investment use · Data as of 2025-12-31</a:t>
-            </a:r>
-          </a:p>
-        </p:txBody>
-      </p:sp>
-      <p:sp>
-        <p:nvSpPr>
-          <p:cNvPr id="19" name="TextBox 18"/>
+              <a:t>Confidential — manager selection review · Data as of 2025-12-31</a:t>
+            </a:r>
+          </a:p>
+        </p:txBody>
+      </p:sp>
+      <p:sp>
+        <p:nvSpPr>
+          <p:cNvPr id="20" name="TextBox 19"/>
           <p:cNvSpPr txBox="1"/>
           <p:nvPr/>
         </p:nvSpPr>
@@ -6105,7 +6483,7 @@
         <p:spPr>
           <a:xfrm>
             <a:off x="640080" y="329184"/>
-            <a:ext cx="9875520" cy="182880"/>
+            <a:ext cx="5303520" cy="182880"/>
           </a:xfrm>
           <a:prstGeom prst="rect">
             <a:avLst/>
@@ -6146,6 +6524,48 @@
         </p:nvSpPr>
         <p:spPr>
           <a:xfrm>
+            <a:off x="5897880" y="310896"/>
+            <a:ext cx="4800600" cy="256032"/>
+          </a:xfrm>
+          <a:prstGeom prst="rect">
+            <a:avLst/>
+          </a:prstGeom>
+          <a:noFill/>
+        </p:spPr>
+        <p:txBody>
+          <a:bodyPr wrap="none" lIns="9144" rIns="9144" tIns="9144" bIns="9144" anchor="t">
+            <a:spAutoFit/>
+          </a:bodyPr>
+          <a:lstStyle/>
+          <a:p>
+            <a:pPr algn="r">
+              <a:spcAft>
+                <a:spcPts val="0"/>
+              </a:spcAft>
+              <a:defRPr sz="680" b="1">
+                <a:solidFill>
+                  <a:srgbClr val="4F6B00"/>
+                </a:solidFill>
+                <a:latin typeface="Inter"/>
+              </a:defRPr>
+            </a:pPr>
+            <a:r>
+              <a:rPr>
+                <a:latin typeface="Inter"/>
+              </a:rPr>
+              <a:t>Illustrative, Gradient Maintained — demo data, not the client's holdings or managers</a:t>
+            </a:r>
+          </a:p>
+        </p:txBody>
+      </p:sp>
+      <p:sp>
+        <p:nvSpPr>
+          <p:cNvPr id="5" name="TextBox 4"/>
+          <p:cNvSpPr txBox="1"/>
+          <p:nvPr/>
+        </p:nvSpPr>
+        <p:spPr>
+          <a:xfrm>
             <a:off x="640080" y="566928"/>
             <a:ext cx="10058400" cy="530352"/>
           </a:xfrm>
@@ -6182,7 +6602,7 @@
       </p:sp>
       <p:sp>
         <p:nvSpPr>
-          <p:cNvPr id="5" name="Rectangle 4"/>
+          <p:cNvPr id="6" name="Rectangle 5"/>
           <p:cNvSpPr/>
           <p:nvPr/>
         </p:nvSpPr>
@@ -6231,7 +6651,7 @@
       </p:sp>
       <p:sp>
         <p:nvSpPr>
-          <p:cNvPr id="6" name="Rectangle 5"/>
+          <p:cNvPr id="7" name="Rectangle 6"/>
           <p:cNvSpPr/>
           <p:nvPr/>
         </p:nvSpPr>
@@ -6280,7 +6700,7 @@
       </p:sp>
       <p:sp>
         <p:nvSpPr>
-          <p:cNvPr id="7" name="TextBox 6"/>
+          <p:cNvPr id="8" name="TextBox 7"/>
           <p:cNvSpPr txBox="1"/>
           <p:nvPr/>
         </p:nvSpPr>
@@ -6322,7 +6742,7 @@
       </p:sp>
       <p:sp>
         <p:nvSpPr>
-          <p:cNvPr id="8" name="Rectangle 7"/>
+          <p:cNvPr id="9" name="Rectangle 8"/>
           <p:cNvSpPr/>
           <p:nvPr/>
         </p:nvSpPr>
@@ -6371,7 +6791,7 @@
       </p:sp>
       <p:sp>
         <p:nvSpPr>
-          <p:cNvPr id="9" name="Rectangle 8"/>
+          <p:cNvPr id="10" name="Rectangle 9"/>
           <p:cNvSpPr/>
           <p:nvPr/>
         </p:nvSpPr>
@@ -6420,7 +6840,7 @@
       </p:sp>
       <p:sp>
         <p:nvSpPr>
-          <p:cNvPr id="10" name="TextBox 9"/>
+          <p:cNvPr id="11" name="TextBox 10"/>
           <p:cNvSpPr txBox="1"/>
           <p:nvPr/>
         </p:nvSpPr>
@@ -6462,7 +6882,7 @@
       </p:sp>
       <p:sp>
         <p:nvSpPr>
-          <p:cNvPr id="11" name="TextBox 10"/>
+          <p:cNvPr id="12" name="TextBox 11"/>
           <p:cNvSpPr txBox="1"/>
           <p:nvPr/>
         </p:nvSpPr>
@@ -6504,7 +6924,7 @@
       </p:sp>
       <p:sp>
         <p:nvSpPr>
-          <p:cNvPr id="12" name="Rectangle 11"/>
+          <p:cNvPr id="13" name="Rectangle 12"/>
           <p:cNvSpPr/>
           <p:nvPr/>
         </p:nvSpPr>
@@ -6553,7 +6973,7 @@
       </p:sp>
       <p:sp>
         <p:nvSpPr>
-          <p:cNvPr id="13" name="Rectangle 12"/>
+          <p:cNvPr id="14" name="Rectangle 13"/>
           <p:cNvSpPr/>
           <p:nvPr/>
         </p:nvSpPr>
@@ -6602,7 +7022,7 @@
       </p:sp>
       <p:sp>
         <p:nvSpPr>
-          <p:cNvPr id="14" name="TextBox 13"/>
+          <p:cNvPr id="15" name="TextBox 14"/>
           <p:cNvSpPr txBox="1"/>
           <p:nvPr/>
         </p:nvSpPr>
@@ -6644,7 +7064,7 @@
       </p:sp>
       <p:sp>
         <p:nvSpPr>
-          <p:cNvPr id="15" name="TextBox 14"/>
+          <p:cNvPr id="16" name="TextBox 15"/>
           <p:cNvSpPr txBox="1"/>
           <p:nvPr/>
         </p:nvSpPr>
@@ -6686,7 +7106,7 @@
       </p:sp>
       <p:sp>
         <p:nvSpPr>
-          <p:cNvPr id="16" name="Rectangle 15"/>
+          <p:cNvPr id="17" name="Rectangle 16"/>
           <p:cNvSpPr/>
           <p:nvPr/>
         </p:nvSpPr>
@@ -6735,7 +7155,7 @@
       </p:sp>
       <p:sp>
         <p:nvSpPr>
-          <p:cNvPr id="17" name="TextBox 16"/>
+          <p:cNvPr id="18" name="TextBox 17"/>
           <p:cNvSpPr txBox="1"/>
           <p:nvPr/>
         </p:nvSpPr>
@@ -6777,7 +7197,7 @@
       </p:sp>
       <p:sp>
         <p:nvSpPr>
-          <p:cNvPr id="18" name="TextBox 17"/>
+          <p:cNvPr id="19" name="TextBox 18"/>
           <p:cNvSpPr txBox="1"/>
           <p:nvPr/>
         </p:nvSpPr>
@@ -6812,14 +7232,14 @@
               <a:rPr>
                 <a:latin typeface="Inter"/>
               </a:rPr>
-              <a:t>Confidential — prepared for internal investment use · Data as of 2025-12-31</a:t>
-            </a:r>
-          </a:p>
-        </p:txBody>
-      </p:sp>
-      <p:sp>
-        <p:nvSpPr>
-          <p:cNvPr id="19" name="TextBox 18"/>
+              <a:t>Confidential — manager selection review · Data as of 2025-12-31</a:t>
+            </a:r>
+          </a:p>
+        </p:txBody>
+      </p:sp>
+      <p:sp>
+        <p:nvSpPr>
+          <p:cNvPr id="20" name="TextBox 19"/>
           <p:cNvSpPr txBox="1"/>
           <p:nvPr/>
         </p:nvSpPr>
@@ -6935,7 +7355,7 @@
         <p:spPr>
           <a:xfrm>
             <a:off x="640080" y="329184"/>
-            <a:ext cx="9875520" cy="182880"/>
+            <a:ext cx="5303520" cy="182880"/>
           </a:xfrm>
           <a:prstGeom prst="rect">
             <a:avLst/>
@@ -6976,6 +7396,48 @@
         </p:nvSpPr>
         <p:spPr>
           <a:xfrm>
+            <a:off x="5897880" y="310896"/>
+            <a:ext cx="4800600" cy="256032"/>
+          </a:xfrm>
+          <a:prstGeom prst="rect">
+            <a:avLst/>
+          </a:prstGeom>
+          <a:noFill/>
+        </p:spPr>
+        <p:txBody>
+          <a:bodyPr wrap="none" lIns="9144" rIns="9144" tIns="9144" bIns="9144" anchor="t">
+            <a:spAutoFit/>
+          </a:bodyPr>
+          <a:lstStyle/>
+          <a:p>
+            <a:pPr algn="r">
+              <a:spcAft>
+                <a:spcPts val="0"/>
+              </a:spcAft>
+              <a:defRPr sz="680" b="1">
+                <a:solidFill>
+                  <a:srgbClr val="4F6B00"/>
+                </a:solidFill>
+                <a:latin typeface="Inter"/>
+              </a:defRPr>
+            </a:pPr>
+            <a:r>
+              <a:rPr>
+                <a:latin typeface="Inter"/>
+              </a:rPr>
+              <a:t>Illustrative, Gradient Maintained — demo data, not the client's holdings or managers</a:t>
+            </a:r>
+          </a:p>
+        </p:txBody>
+      </p:sp>
+      <p:sp>
+        <p:nvSpPr>
+          <p:cNvPr id="5" name="TextBox 4"/>
+          <p:cNvSpPr txBox="1"/>
+          <p:nvPr/>
+        </p:nvSpPr>
+        <p:spPr>
+          <a:xfrm>
             <a:off x="640080" y="566928"/>
             <a:ext cx="10058400" cy="530352"/>
           </a:xfrm>
@@ -7012,7 +7474,7 @@
       </p:sp>
       <p:sp>
         <p:nvSpPr>
-          <p:cNvPr id="5" name="Rectangle 4"/>
+          <p:cNvPr id="6" name="Rectangle 5"/>
           <p:cNvSpPr/>
           <p:nvPr/>
         </p:nvSpPr>
@@ -7061,7 +7523,7 @@
       </p:sp>
       <p:sp>
         <p:nvSpPr>
-          <p:cNvPr id="6" name="Rectangle 5"/>
+          <p:cNvPr id="7" name="Rectangle 6"/>
           <p:cNvSpPr/>
           <p:nvPr/>
         </p:nvSpPr>
@@ -7110,7 +7572,7 @@
       </p:sp>
       <p:sp>
         <p:nvSpPr>
-          <p:cNvPr id="7" name="TextBox 6"/>
+          <p:cNvPr id="8" name="TextBox 7"/>
           <p:cNvSpPr txBox="1"/>
           <p:nvPr/>
         </p:nvSpPr>
@@ -7152,7 +7614,7 @@
       </p:sp>
       <p:sp>
         <p:nvSpPr>
-          <p:cNvPr id="8" name="Rectangle 7"/>
+          <p:cNvPr id="9" name="Rectangle 8"/>
           <p:cNvSpPr/>
           <p:nvPr/>
         </p:nvSpPr>
@@ -7201,7 +7663,7 @@
       </p:sp>
       <p:sp>
         <p:nvSpPr>
-          <p:cNvPr id="9" name="Rectangle 8"/>
+          <p:cNvPr id="10" name="Rectangle 9"/>
           <p:cNvSpPr/>
           <p:nvPr/>
         </p:nvSpPr>
@@ -7250,7 +7712,7 @@
       </p:sp>
       <p:sp>
         <p:nvSpPr>
-          <p:cNvPr id="10" name="TextBox 9"/>
+          <p:cNvPr id="11" name="TextBox 10"/>
           <p:cNvSpPr txBox="1"/>
           <p:nvPr/>
         </p:nvSpPr>
@@ -7292,7 +7754,7 @@
       </p:sp>
       <p:sp>
         <p:nvSpPr>
-          <p:cNvPr id="11" name="TextBox 10"/>
+          <p:cNvPr id="12" name="TextBox 11"/>
           <p:cNvSpPr txBox="1"/>
           <p:nvPr/>
         </p:nvSpPr>
@@ -7334,7 +7796,7 @@
       </p:sp>
       <p:sp>
         <p:nvSpPr>
-          <p:cNvPr id="12" name="Rectangle 11"/>
+          <p:cNvPr id="13" name="Rectangle 12"/>
           <p:cNvSpPr/>
           <p:nvPr/>
         </p:nvSpPr>
@@ -7383,7 +7845,7 @@
       </p:sp>
       <p:sp>
         <p:nvSpPr>
-          <p:cNvPr id="13" name="Rectangle 12"/>
+          <p:cNvPr id="14" name="Rectangle 13"/>
           <p:cNvSpPr/>
           <p:nvPr/>
         </p:nvSpPr>
@@ -7432,7 +7894,7 @@
       </p:sp>
       <p:sp>
         <p:nvSpPr>
-          <p:cNvPr id="14" name="TextBox 13"/>
+          <p:cNvPr id="15" name="TextBox 14"/>
           <p:cNvSpPr txBox="1"/>
           <p:nvPr/>
         </p:nvSpPr>
@@ -7474,7 +7936,7 @@
       </p:sp>
       <p:sp>
         <p:nvSpPr>
-          <p:cNvPr id="15" name="TextBox 14"/>
+          <p:cNvPr id="16" name="TextBox 15"/>
           <p:cNvSpPr txBox="1"/>
           <p:nvPr/>
         </p:nvSpPr>
@@ -7516,7 +7978,7 @@
       </p:sp>
       <p:sp>
         <p:nvSpPr>
-          <p:cNvPr id="16" name="Rectangle 15"/>
+          <p:cNvPr id="17" name="Rectangle 16"/>
           <p:cNvSpPr/>
           <p:nvPr/>
         </p:nvSpPr>
@@ -7565,7 +8027,7 @@
       </p:sp>
       <p:sp>
         <p:nvSpPr>
-          <p:cNvPr id="17" name="TextBox 16"/>
+          <p:cNvPr id="18" name="TextBox 17"/>
           <p:cNvSpPr txBox="1"/>
           <p:nvPr/>
         </p:nvSpPr>
@@ -7607,7 +8069,7 @@
       </p:sp>
       <p:sp>
         <p:nvSpPr>
-          <p:cNvPr id="18" name="TextBox 17"/>
+          <p:cNvPr id="19" name="TextBox 18"/>
           <p:cNvSpPr txBox="1"/>
           <p:nvPr/>
         </p:nvSpPr>
@@ -7642,14 +8104,14 @@
               <a:rPr>
                 <a:latin typeface="Inter"/>
               </a:rPr>
-              <a:t>Confidential — prepared for internal investment use · Data as of 2025-12-31</a:t>
-            </a:r>
-          </a:p>
-        </p:txBody>
-      </p:sp>
-      <p:sp>
-        <p:nvSpPr>
-          <p:cNvPr id="19" name="TextBox 18"/>
+              <a:t>Confidential — manager selection review · Data as of 2025-12-31</a:t>
+            </a:r>
+          </a:p>
+        </p:txBody>
+      </p:sp>
+      <p:sp>
+        <p:nvSpPr>
+          <p:cNvPr id="20" name="TextBox 19"/>
           <p:cNvSpPr txBox="1"/>
           <p:nvPr/>
         </p:nvSpPr>
@@ -7765,7 +8227,7 @@
         <p:spPr>
           <a:xfrm>
             <a:off x="640080" y="329184"/>
-            <a:ext cx="9875520" cy="182880"/>
+            <a:ext cx="5303520" cy="182880"/>
           </a:xfrm>
           <a:prstGeom prst="rect">
             <a:avLst/>
@@ -7806,6 +8268,48 @@
         </p:nvSpPr>
         <p:spPr>
           <a:xfrm>
+            <a:off x="5897880" y="310896"/>
+            <a:ext cx="4800600" cy="256032"/>
+          </a:xfrm>
+          <a:prstGeom prst="rect">
+            <a:avLst/>
+          </a:prstGeom>
+          <a:noFill/>
+        </p:spPr>
+        <p:txBody>
+          <a:bodyPr wrap="none" lIns="9144" rIns="9144" tIns="9144" bIns="9144" anchor="t">
+            <a:spAutoFit/>
+          </a:bodyPr>
+          <a:lstStyle/>
+          <a:p>
+            <a:pPr algn="r">
+              <a:spcAft>
+                <a:spcPts val="0"/>
+              </a:spcAft>
+              <a:defRPr sz="680" b="1">
+                <a:solidFill>
+                  <a:srgbClr val="4F6B00"/>
+                </a:solidFill>
+                <a:latin typeface="Inter"/>
+              </a:defRPr>
+            </a:pPr>
+            <a:r>
+              <a:rPr>
+                <a:latin typeface="Inter"/>
+              </a:rPr>
+              <a:t>Illustrative, Gradient Maintained — demo data, not the client's holdings or managers</a:t>
+            </a:r>
+          </a:p>
+        </p:txBody>
+      </p:sp>
+      <p:sp>
+        <p:nvSpPr>
+          <p:cNvPr id="5" name="TextBox 4"/>
+          <p:cNvSpPr txBox="1"/>
+          <p:nvPr/>
+        </p:nvSpPr>
+        <p:spPr>
+          <a:xfrm>
             <a:off x="640080" y="566928"/>
             <a:ext cx="10058400" cy="530352"/>
           </a:xfrm>
@@ -7842,7 +8346,7 @@
       </p:sp>
       <p:sp>
         <p:nvSpPr>
-          <p:cNvPr id="5" name="Rectangle 4"/>
+          <p:cNvPr id="6" name="Rectangle 5"/>
           <p:cNvSpPr/>
           <p:nvPr/>
         </p:nvSpPr>
@@ -7891,7 +8395,7 @@
       </p:sp>
       <p:sp>
         <p:nvSpPr>
-          <p:cNvPr id="6" name="Rectangle 5"/>
+          <p:cNvPr id="7" name="Rectangle 6"/>
           <p:cNvSpPr/>
           <p:nvPr/>
         </p:nvSpPr>
@@ -7940,7 +8444,7 @@
       </p:sp>
       <p:sp>
         <p:nvSpPr>
-          <p:cNvPr id="7" name="TextBox 6"/>
+          <p:cNvPr id="8" name="TextBox 7"/>
           <p:cNvSpPr txBox="1"/>
           <p:nvPr/>
         </p:nvSpPr>
@@ -7982,7 +8486,7 @@
       </p:sp>
       <p:sp>
         <p:nvSpPr>
-          <p:cNvPr id="8" name="TextBox 7"/>
+          <p:cNvPr id="9" name="TextBox 8"/>
           <p:cNvSpPr txBox="1"/>
           <p:nvPr/>
         </p:nvSpPr>
@@ -8031,7 +8535,7 @@
       </p:sp>
       <p:sp>
         <p:nvSpPr>
-          <p:cNvPr id="9" name="Rectangle 8"/>
+          <p:cNvPr id="10" name="Rectangle 9"/>
           <p:cNvSpPr/>
           <p:nvPr/>
         </p:nvSpPr>
@@ -8080,7 +8584,7 @@
       </p:sp>
       <p:sp>
         <p:nvSpPr>
-          <p:cNvPr id="10" name="TextBox 9"/>
+          <p:cNvPr id="11" name="TextBox 10"/>
           <p:cNvSpPr txBox="1"/>
           <p:nvPr/>
         </p:nvSpPr>
@@ -8122,7 +8626,7 @@
       </p:sp>
       <p:sp>
         <p:nvSpPr>
-          <p:cNvPr id="11" name="TextBox 10"/>
+          <p:cNvPr id="12" name="TextBox 11"/>
           <p:cNvSpPr txBox="1"/>
           <p:nvPr/>
         </p:nvSpPr>
@@ -8157,14 +8661,14 @@
               <a:rPr>
                 <a:latin typeface="Inter"/>
               </a:rPr>
-              <a:t>Confidential — prepared for internal investment use · Data as of 2025-12-31</a:t>
-            </a:r>
-          </a:p>
-        </p:txBody>
-      </p:sp>
-      <p:sp>
-        <p:nvSpPr>
-          <p:cNvPr id="12" name="TextBox 11"/>
+              <a:t>Confidential — manager selection review · Data as of 2025-12-31</a:t>
+            </a:r>
+          </a:p>
+        </p:txBody>
+      </p:sp>
+      <p:sp>
+        <p:nvSpPr>
+          <p:cNvPr id="13" name="TextBox 12"/>
           <p:cNvSpPr txBox="1"/>
           <p:nvPr/>
         </p:nvSpPr>
@@ -8280,7 +8784,7 @@
         <p:spPr>
           <a:xfrm>
             <a:off x="640080" y="329184"/>
-            <a:ext cx="9875520" cy="182880"/>
+            <a:ext cx="5303520" cy="182880"/>
           </a:xfrm>
           <a:prstGeom prst="rect">
             <a:avLst/>
@@ -8308,7 +8812,7 @@
               <a:rPr>
                 <a:latin typeface="Inter"/>
               </a:rPr>
-              <a:t>SAVED FICTIONAL TEST EVIDENCE</a:t>
+              <a:t>SAVED ILLUSTRATIVE SAMPLE EVIDENCE</a:t>
             </a:r>
           </a:p>
         </p:txBody>
@@ -8316,6 +8820,48 @@
       <p:sp>
         <p:nvSpPr>
           <p:cNvPr id="4" name="TextBox 3"/>
+          <p:cNvSpPr txBox="1"/>
+          <p:nvPr/>
+        </p:nvSpPr>
+        <p:spPr>
+          <a:xfrm>
+            <a:off x="5897880" y="310896"/>
+            <a:ext cx="4800600" cy="256032"/>
+          </a:xfrm>
+          <a:prstGeom prst="rect">
+            <a:avLst/>
+          </a:prstGeom>
+          <a:noFill/>
+        </p:spPr>
+        <p:txBody>
+          <a:bodyPr wrap="none" lIns="9144" rIns="9144" tIns="9144" bIns="9144" anchor="t">
+            <a:spAutoFit/>
+          </a:bodyPr>
+          <a:lstStyle/>
+          <a:p>
+            <a:pPr algn="r">
+              <a:spcAft>
+                <a:spcPts val="0"/>
+              </a:spcAft>
+              <a:defRPr sz="680" b="1">
+                <a:solidFill>
+                  <a:srgbClr val="4F6B00"/>
+                </a:solidFill>
+                <a:latin typeface="Inter"/>
+              </a:defRPr>
+            </a:pPr>
+            <a:r>
+              <a:rPr>
+                <a:latin typeface="Inter"/>
+              </a:rPr>
+              <a:t>Illustrative, Gradient Maintained — demo data, not the client's holdings or managers</a:t>
+            </a:r>
+          </a:p>
+        </p:txBody>
+      </p:sp>
+      <p:sp>
+        <p:nvSpPr>
+          <p:cNvPr id="5" name="TextBox 4"/>
           <p:cNvSpPr txBox="1"/>
           <p:nvPr/>
         </p:nvSpPr>
@@ -8350,14 +8896,14 @@
               <a:rPr>
                 <a:latin typeface="Inter"/>
               </a:rPr>
-              <a:t>Appendix A — Sources and methods</a:t>
-            </a:r>
-          </a:p>
-        </p:txBody>
-      </p:sp>
-      <p:sp>
-        <p:nvSpPr>
-          <p:cNvPr id="5" name="Rectangle 4"/>
+              <a:t>Appendix — Sources and methods</a:t>
+            </a:r>
+          </a:p>
+        </p:txBody>
+      </p:sp>
+      <p:sp>
+        <p:nvSpPr>
+          <p:cNvPr id="6" name="Rectangle 5"/>
           <p:cNvSpPr/>
           <p:nvPr/>
         </p:nvSpPr>
@@ -8406,7 +8952,7 @@
       </p:sp>
       <p:sp>
         <p:nvSpPr>
-          <p:cNvPr id="6" name="Rectangle 5"/>
+          <p:cNvPr id="7" name="Rectangle 6"/>
           <p:cNvSpPr/>
           <p:nvPr/>
         </p:nvSpPr>
@@ -8455,7 +9001,7 @@
       </p:sp>
       <p:sp>
         <p:nvSpPr>
-          <p:cNvPr id="7" name="TextBox 6"/>
+          <p:cNvPr id="8" name="TextBox 7"/>
           <p:cNvSpPr txBox="1"/>
           <p:nvPr/>
         </p:nvSpPr>
@@ -8490,14 +9036,14 @@
               <a:rPr>
                 <a:latin typeface="Inter"/>
               </a:rPr>
-              <a:t>07</a:t>
+              <a:t>A</a:t>
             </a:r>
           </a:p>
         </p:txBody>
       </p:sp>
       <p:graphicFrame>
         <p:nvGraphicFramePr>
-          <p:cNvPr id="8" name="Table 7"/>
+          <p:cNvPr id="9" name="Table 8"/>
           <p:cNvGraphicFramePr>
             <a:graphicFrameLocks noGrp="1"/>
           </p:cNvGraphicFramePr>
@@ -8505,7 +9051,7 @@
         </p:nvGraphicFramePr>
         <p:xfrm>
           <a:off x="640080" y="1325880"/>
-          <a:ext cx="10908792" cy="1169662"/>
+          <a:ext cx="10908792" cy="968494"/>
         </p:xfrm>
         <a:graphic>
           <a:graphicData uri="http://schemas.openxmlformats.org/drawingml/2006/table">
@@ -8515,10 +9061,16 @@
               </a:tblPr>
               <a:tblGrid>
                 <a:gridCol w="2011680"/>
-                <a:gridCol w="4448556"/>
-                <a:gridCol w="4448556"/>
+                <a:gridCol w="1112139"/>
+                <a:gridCol w="1112139"/>
+                <a:gridCol w="1112139"/>
+                <a:gridCol w="1112139"/>
+                <a:gridCol w="1112139"/>
+                <a:gridCol w="1112139"/>
+                <a:gridCol w="1112139"/>
+                <a:gridCol w="1112139"/>
               </a:tblGrid>
-              <a:tr h="584831">
+              <a:tr h="484247">
                 <a:tc>
                   <a:txBody>
                     <a:bodyPr/>
@@ -8590,7 +9142,169 @@
                         <a:rPr>
                           <a:latin typeface="Inter"/>
                         </a:rPr>
-                        <a:t>Tool</a:t>
+                        <a:t>Basis</a:t>
+                      </a:r>
+                    </a:p>
+                  </a:txBody>
+                  <a:tcPr marL="54864" marR="54864" marT="27432" marB="27432" anchor="ctr">
+                    <a:solidFill>
+                      <a:srgbClr val="0D1117"/>
+                    </a:solidFill>
+                  </a:tcPr>
+                </a:tc>
+                <a:tc>
+                  <a:txBody>
+                    <a:bodyPr/>
+                    <a:lstStyle/>
+                    <a:p>
+                      <a:pPr>
+                        <a:defRPr sz="750" b="1">
+                          <a:solidFill>
+                            <a:srgbClr val="FFFFFF"/>
+                          </a:solidFill>
+                          <a:latin typeface="Inter"/>
+                        </a:defRPr>
+                      </a:pPr>
+                      <a:r>
+                        <a:rPr>
+                          <a:latin typeface="Inter"/>
+                        </a:rPr>
+                        <a:t>Tool / view</a:t>
+                      </a:r>
+                    </a:p>
+                  </a:txBody>
+                  <a:tcPr marL="54864" marR="54864" marT="27432" marB="27432" anchor="ctr">
+                    <a:solidFill>
+                      <a:srgbClr val="0D1117"/>
+                    </a:solidFill>
+                  </a:tcPr>
+                </a:tc>
+                <a:tc>
+                  <a:txBody>
+                    <a:bodyPr/>
+                    <a:lstStyle/>
+                    <a:p>
+                      <a:pPr>
+                        <a:defRPr sz="750" b="1">
+                          <a:solidFill>
+                            <a:srgbClr val="FFFFFF"/>
+                          </a:solidFill>
+                          <a:latin typeface="Inter"/>
+                        </a:defRPr>
+                      </a:pPr>
+                      <a:r>
+                        <a:rPr>
+                          <a:latin typeface="Inter"/>
+                        </a:rPr>
+                        <a:t>Key parameters</a:t>
+                      </a:r>
+                    </a:p>
+                  </a:txBody>
+                  <a:tcPr marL="54864" marR="54864" marT="27432" marB="27432" anchor="ctr">
+                    <a:solidFill>
+                      <a:srgbClr val="0D1117"/>
+                    </a:solidFill>
+                  </a:tcPr>
+                </a:tc>
+                <a:tc>
+                  <a:txBody>
+                    <a:bodyPr/>
+                    <a:lstStyle/>
+                    <a:p>
+                      <a:pPr>
+                        <a:defRPr sz="750" b="1">
+                          <a:solidFill>
+                            <a:srgbClr val="FFFFFF"/>
+                          </a:solidFill>
+                          <a:latin typeface="Inter"/>
+                        </a:defRPr>
+                      </a:pPr>
+                      <a:r>
+                        <a:rPr>
+                          <a:latin typeface="Inter"/>
+                        </a:rPr>
+                        <a:t>As of</a:t>
+                      </a:r>
+                    </a:p>
+                  </a:txBody>
+                  <a:tcPr marL="54864" marR="54864" marT="27432" marB="27432" anchor="ctr">
+                    <a:solidFill>
+                      <a:srgbClr val="0D1117"/>
+                    </a:solidFill>
+                  </a:tcPr>
+                </a:tc>
+                <a:tc>
+                  <a:txBody>
+                    <a:bodyPr/>
+                    <a:lstStyle/>
+                    <a:p>
+                      <a:pPr>
+                        <a:defRPr sz="750" b="1">
+                          <a:solidFill>
+                            <a:srgbClr val="FFFFFF"/>
+                          </a:solidFill>
+                          <a:latin typeface="Inter"/>
+                        </a:defRPr>
+                      </a:pPr>
+                      <a:r>
+                        <a:rPr>
+                          <a:latin typeface="Inter"/>
+                        </a:rPr>
+                        <a:t>Data scope</a:t>
+                      </a:r>
+                    </a:p>
+                  </a:txBody>
+                  <a:tcPr marL="54864" marR="54864" marT="27432" marB="27432" anchor="ctr">
+                    <a:solidFill>
+                      <a:srgbClr val="0D1117"/>
+                    </a:solidFill>
+                  </a:tcPr>
+                </a:tc>
+                <a:tc>
+                  <a:txBody>
+                    <a:bodyPr/>
+                    <a:lstStyle/>
+                    <a:p>
+                      <a:pPr>
+                        <a:defRPr sz="750" b="1">
+                          <a:solidFill>
+                            <a:srgbClr val="FFFFFF"/>
+                          </a:solidFill>
+                          <a:latin typeface="Inter"/>
+                        </a:defRPr>
+                      </a:pPr>
+                      <a:r>
+                        <a:rPr>
+                          <a:latin typeface="Inter"/>
+                        </a:rPr>
+                        <a:t>Validation</a:t>
+                      </a:r>
+                    </a:p>
+                  </a:txBody>
+                  <a:tcPr marL="54864" marR="54864" marT="27432" marB="27432" anchor="ctr">
+                    <a:solidFill>
+                      <a:srgbClr val="0D1117"/>
+                    </a:solidFill>
+                  </a:tcPr>
+                </a:tc>
+                <a:tc>
+                  <a:txBody>
+                    <a:bodyPr/>
+                    <a:lstStyle/>
+                    <a:p>
+                      <a:pPr>
+                        <a:defRPr sz="750" b="1">
+                          <a:solidFill>
+                            <a:srgbClr val="FFFFFF"/>
+                          </a:solidFill>
+                          <a:latin typeface="Inter"/>
+                        </a:defRPr>
+                      </a:pPr>
+                      <a:r>
+                        <a:rPr>
+                          <a:latin typeface="Inter"/>
+                        </a:rPr>
+                        <a:t>Digest</a:t>
                       </a:r>
                     </a:p>
                   </a:txBody>
@@ -8601,14 +9315,14 @@
                   </a:tcPr>
                 </a:tc>
               </a:tr>
-              <a:tr h="584831">
+              <a:tr h="484247">
                 <a:tc>
                   <a:txBody>
                     <a:bodyPr/>
                     <a:lstStyle/>
                     <a:p>
                       <a:pPr>
-                        <a:defRPr sz="800" b="1">
+                        <a:defRPr sz="650" b="1">
                           <a:solidFill>
                             <a:srgbClr val="0D1117"/>
                           </a:solidFill>
@@ -8635,7 +9349,7 @@
                     <a:lstStyle/>
                     <a:p>
                       <a:pPr>
-                        <a:defRPr sz="800" b="0">
+                        <a:defRPr sz="650" b="0">
                           <a:solidFill>
                             <a:srgbClr val="0D1117"/>
                           </a:solidFill>
@@ -8662,7 +9376,34 @@
                     <a:lstStyle/>
                     <a:p>
                       <a:pPr>
-                        <a:defRPr sz="800" b="0">
+                        <a:defRPr sz="650" b="0">
+                          <a:solidFill>
+                            <a:srgbClr val="0D1117"/>
+                          </a:solidFill>
+                          <a:latin typeface="Inter"/>
+                        </a:defRPr>
+                      </a:pPr>
+                      <a:r>
+                        <a:rPr>
+                          <a:latin typeface="Inter"/>
+                        </a:rPr>
+                        <a:t>gradient_tool</a:t>
+                      </a:r>
+                    </a:p>
+                  </a:txBody>
+                  <a:tcPr marL="54864" marR="54864" marT="27432" marB="27432" anchor="ctr">
+                    <a:solidFill>
+                      <a:srgbClr val="FFFFFF"/>
+                    </a:solidFill>
+                  </a:tcPr>
+                </a:tc>
+                <a:tc>
+                  <a:txBody>
+                    <a:bodyPr/>
+                    <a:lstStyle/>
+                    <a:p>
+                      <a:pPr>
+                        <a:defRPr sz="650" b="0">
                           <a:solidFill>
                             <a:srgbClr val="0D1117"/>
                           </a:solidFill>
@@ -8683,6 +9424,141 @@
                     </a:solidFill>
                   </a:tcPr>
                 </a:tc>
+                <a:tc>
+                  <a:txBody>
+                    <a:bodyPr/>
+                    <a:lstStyle/>
+                    <a:p>
+                      <a:pPr>
+                        <a:defRPr sz="650" b="0">
+                          <a:solidFill>
+                            <a:srgbClr val="0D1117"/>
+                          </a:solidFill>
+                          <a:latin typeface="Inter"/>
+                        </a:defRPr>
+                      </a:pPr>
+                      <a:r>
+                        <a:rPr>
+                          <a:latin typeface="Inter"/>
+                        </a:rPr>
+                        <a:t>illustrative sample</a:t>
+                      </a:r>
+                    </a:p>
+                  </a:txBody>
+                  <a:tcPr marL="54864" marR="54864" marT="27432" marB="27432" anchor="ctr">
+                    <a:solidFill>
+                      <a:srgbClr val="FFFFFF"/>
+                    </a:solidFill>
+                  </a:tcPr>
+                </a:tc>
+                <a:tc>
+                  <a:txBody>
+                    <a:bodyPr/>
+                    <a:lstStyle/>
+                    <a:p>
+                      <a:pPr>
+                        <a:defRPr sz="650" b="0">
+                          <a:solidFill>
+                            <a:srgbClr val="0D1117"/>
+                          </a:solidFill>
+                          <a:latin typeface="Inter"/>
+                        </a:defRPr>
+                      </a:pPr>
+                      <a:r>
+                        <a:rPr>
+                          <a:latin typeface="Inter"/>
+                        </a:rPr>
+                        <a:t>2025-12-31</a:t>
+                      </a:r>
+                    </a:p>
+                  </a:txBody>
+                  <a:tcPr marL="54864" marR="54864" marT="27432" marB="27432" anchor="ctr">
+                    <a:solidFill>
+                      <a:srgbClr val="FFFFFF"/>
+                    </a:solidFill>
+                  </a:tcPr>
+                </a:tc>
+                <a:tc>
+                  <a:txBody>
+                    <a:bodyPr/>
+                    <a:lstStyle/>
+                    <a:p>
+                      <a:pPr>
+                        <a:defRPr sz="650" b="0">
+                          <a:solidFill>
+                            <a:srgbClr val="0D1117"/>
+                          </a:solidFill>
+                          <a:latin typeface="Inter"/>
+                        </a:defRPr>
+                      </a:pPr>
+                      <a:r>
+                        <a:rPr>
+                          <a:latin typeface="Inter"/>
+                        </a:rPr>
+                        <a:t>Gradient-governed review evidence</a:t>
+                      </a:r>
+                    </a:p>
+                  </a:txBody>
+                  <a:tcPr marL="54864" marR="54864" marT="27432" marB="27432" anchor="ctr">
+                    <a:solidFill>
+                      <a:srgbClr val="FFFFFF"/>
+                    </a:solidFill>
+                  </a:tcPr>
+                </a:tc>
+                <a:tc>
+                  <a:txBody>
+                    <a:bodyPr/>
+                    <a:lstStyle/>
+                    <a:p>
+                      <a:pPr>
+                        <a:defRPr sz="650" b="0">
+                          <a:solidFill>
+                            <a:srgbClr val="0D1117"/>
+                          </a:solidFill>
+                          <a:latin typeface="Inter"/>
+                        </a:defRPr>
+                      </a:pPr>
+                      <a:r>
+                        <a:rPr>
+                          <a:latin typeface="Inter"/>
+                        </a:rPr>
+                        <a:t>passed</a:t>
+                      </a:r>
+                    </a:p>
+                  </a:txBody>
+                  <a:tcPr marL="54864" marR="54864" marT="27432" marB="27432" anchor="ctr">
+                    <a:solidFill>
+                      <a:srgbClr val="FFFFFF"/>
+                    </a:solidFill>
+                  </a:tcPr>
+                </a:tc>
+                <a:tc>
+                  <a:txBody>
+                    <a:bodyPr/>
+                    <a:lstStyle/>
+                    <a:p>
+                      <a:pPr>
+                        <a:defRPr sz="650" b="0">
+                          <a:solidFill>
+                            <a:srgbClr val="0D1117"/>
+                          </a:solidFill>
+                          <a:latin typeface="Inter"/>
+                        </a:defRPr>
+                      </a:pPr>
+                      <a:r>
+                        <a:rPr>
+                          <a:latin typeface="Inter"/>
+                        </a:rPr>
+                        <a:t>sha256:aaaaaaaaaaaaaaaaaaaaaaaaaaaaaaaaaaaaaaaaaaaaaaaaaaaaaaaaaaaaaaaa</a:t>
+                      </a:r>
+                    </a:p>
+                  </a:txBody>
+                  <a:tcPr marL="54864" marR="54864" marT="27432" marB="27432" anchor="ctr">
+                    <a:solidFill>
+                      <a:srgbClr val="FFFFFF"/>
+                    </a:solidFill>
+                  </a:tcPr>
+                </a:tc>
               </a:tr>
             </a:tbl>
           </a:graphicData>
@@ -8690,7 +9566,49 @@
       </p:graphicFrame>
       <p:sp>
         <p:nvSpPr>
-          <p:cNvPr id="9" name="Rectangle 8"/>
+          <p:cNvPr id="10" name="TextBox 9"/>
+          <p:cNvSpPr txBox="1"/>
+          <p:nvPr/>
+        </p:nvSpPr>
+        <p:spPr>
+          <a:xfrm>
+            <a:off x="640080" y="2312662"/>
+            <a:ext cx="10908792" cy="164592"/>
+          </a:xfrm>
+          <a:prstGeom prst="rect">
+            <a:avLst/>
+          </a:prstGeom>
+          <a:noFill/>
+        </p:spPr>
+        <p:txBody>
+          <a:bodyPr wrap="none" lIns="9144" rIns="9144" tIns="9144" bIns="9144" anchor="t">
+            <a:spAutoFit/>
+          </a:bodyPr>
+          <a:lstStyle/>
+          <a:p>
+            <a:pPr algn="l">
+              <a:spcAft>
+                <a:spcPts val="0"/>
+              </a:spcAft>
+              <a:defRPr sz="680" b="0">
+                <a:solidFill>
+                  <a:srgbClr val="8A94A1"/>
+                </a:solidFill>
+                <a:latin typeface="Inter"/>
+              </a:defRPr>
+            </a:pPr>
+            <a:r>
+              <a:rPr>
+                <a:latin typeface="Inter"/>
+              </a:rPr>
+              <a:t>Illustrative, Gradient Maintained — demo data, not the client's holdings or managers. All organizations, portfolios, managers and results in this public example are illustrative.</a:t>
+            </a:r>
+          </a:p>
+        </p:txBody>
+      </p:sp>
+      <p:sp>
+        <p:nvSpPr>
+          <p:cNvPr id="11" name="Rectangle 10"/>
           <p:cNvSpPr/>
           <p:nvPr/>
         </p:nvSpPr>
@@ -8739,7 +9657,7 @@
       </p:sp>
       <p:sp>
         <p:nvSpPr>
-          <p:cNvPr id="10" name="Rectangle 9"/>
+          <p:cNvPr id="12" name="Rectangle 11"/>
           <p:cNvSpPr/>
           <p:nvPr/>
         </p:nvSpPr>
@@ -8788,7 +9706,7 @@
       </p:sp>
       <p:sp>
         <p:nvSpPr>
-          <p:cNvPr id="11" name="TextBox 10"/>
+          <p:cNvPr id="13" name="TextBox 12"/>
           <p:cNvSpPr txBox="1"/>
           <p:nvPr/>
         </p:nvSpPr>
@@ -8830,7 +9748,7 @@
       </p:sp>
       <p:sp>
         <p:nvSpPr>
-          <p:cNvPr id="12" name="TextBox 11"/>
+          <p:cNvPr id="14" name="TextBox 13"/>
           <p:cNvSpPr txBox="1"/>
           <p:nvPr/>
         </p:nvSpPr>
@@ -8872,7 +9790,7 @@
       </p:sp>
       <p:sp>
         <p:nvSpPr>
-          <p:cNvPr id="13" name="Rectangle 12"/>
+          <p:cNvPr id="15" name="Rectangle 14"/>
           <p:cNvSpPr/>
           <p:nvPr/>
         </p:nvSpPr>
@@ -8921,7 +9839,7 @@
       </p:sp>
       <p:sp>
         <p:nvSpPr>
-          <p:cNvPr id="14" name="Rectangle 13"/>
+          <p:cNvPr id="16" name="Rectangle 15"/>
           <p:cNvSpPr/>
           <p:nvPr/>
         </p:nvSpPr>
@@ -8970,7 +9888,7 @@
       </p:sp>
       <p:sp>
         <p:nvSpPr>
-          <p:cNvPr id="15" name="TextBox 14"/>
+          <p:cNvPr id="17" name="TextBox 16"/>
           <p:cNvSpPr txBox="1"/>
           <p:nvPr/>
         </p:nvSpPr>
@@ -9012,7 +9930,7 @@
       </p:sp>
       <p:sp>
         <p:nvSpPr>
-          <p:cNvPr id="16" name="TextBox 15"/>
+          <p:cNvPr id="18" name="TextBox 17"/>
           <p:cNvSpPr txBox="1"/>
           <p:nvPr/>
         </p:nvSpPr>
@@ -9054,7 +9972,7 @@
       </p:sp>
       <p:sp>
         <p:nvSpPr>
-          <p:cNvPr id="17" name="Rectangle 16"/>
+          <p:cNvPr id="19" name="Rectangle 18"/>
           <p:cNvSpPr/>
           <p:nvPr/>
         </p:nvSpPr>
@@ -9103,7 +10021,7 @@
       </p:sp>
       <p:sp>
         <p:nvSpPr>
-          <p:cNvPr id="18" name="TextBox 17"/>
+          <p:cNvPr id="20" name="TextBox 19"/>
           <p:cNvSpPr txBox="1"/>
           <p:nvPr/>
         </p:nvSpPr>
@@ -9145,7 +10063,7 @@
       </p:sp>
       <p:sp>
         <p:nvSpPr>
-          <p:cNvPr id="19" name="TextBox 18"/>
+          <p:cNvPr id="21" name="TextBox 20"/>
           <p:cNvSpPr txBox="1"/>
           <p:nvPr/>
         </p:nvSpPr>
@@ -9180,14 +10098,14 @@
               <a:rPr>
                 <a:latin typeface="Inter"/>
               </a:rPr>
-              <a:t>Confidential — prepared for internal investment use · Data as of 2025-12-31</a:t>
-            </a:r>
-          </a:p>
-        </p:txBody>
-      </p:sp>
-      <p:sp>
-        <p:nvSpPr>
-          <p:cNvPr id="20" name="TextBox 19"/>
+              <a:t>Confidential — manager selection review · Data as of 2025-12-31</a:t>
+            </a:r>
+          </a:p>
+        </p:txBody>
+      </p:sp>
+      <p:sp>
+        <p:nvSpPr>
+          <p:cNvPr id="22" name="TextBox 21"/>
           <p:cNvSpPr txBox="1"/>
           <p:nvPr/>
         </p:nvSpPr>
